--- a/开题报告/于琪-开题PPT(20260909).pptx
+++ b/开题报告/于琪-开题PPT(20260909).pptx
@@ -12428,14 +12428,22 @@
               <a:buChar char="l"/>
             </a:pPr>
             <a:r>
-              <a:rPr lang="zh-CN" altLang="en-US" sz="1600" dirty="0">
+              <a:rPr lang="zh-CN" altLang="en-US" sz="1600" b="1" dirty="0">
                 <a:latin typeface="微软雅黑" panose="020B0503020204020204" pitchFamily="34" charset="-122"/>
                 <a:ea typeface="微软雅黑" panose="020B0503020204020204" pitchFamily="34" charset="-122"/>
                 <a:cs typeface="Times New Roman" panose="02020603050405020304" pitchFamily="18" charset="0"/>
               </a:rPr>
-              <a:t>已有检测：</a:t>
-            </a:r>
-            <a:endParaRPr lang="zh-CN" altLang="en-US" sz="1600" dirty="0">
+              <a:t>已</a:t>
+            </a:r>
+            <a:r>
+              <a:rPr lang="zh-CN" altLang="en-US" sz="1600" b="1" dirty="0" smtClean="0">
+                <a:latin typeface="微软雅黑" panose="020B0503020204020204" pitchFamily="34" charset="-122"/>
+                <a:ea typeface="微软雅黑" panose="020B0503020204020204" pitchFamily="34" charset="-122"/>
+                <a:cs typeface="Times New Roman" panose="02020603050405020304" pitchFamily="18" charset="0"/>
+              </a:rPr>
+              <a:t>有方法：</a:t>
+            </a:r>
+            <a:endParaRPr lang="zh-CN" altLang="en-US" sz="1600" b="1" dirty="0">
               <a:latin typeface="微软雅黑" panose="020B0503020204020204" pitchFamily="34" charset="-122"/>
               <a:ea typeface="微软雅黑" panose="020B0503020204020204" pitchFamily="34" charset="-122"/>
             </a:endParaRPr>
@@ -12543,7 +12551,7 @@
               <a:buChar char="l"/>
             </a:pPr>
             <a:r>
-              <a:rPr lang="zh-CN" altLang="en-US" sz="1600" dirty="0" smtClean="0">
+              <a:rPr lang="zh-CN" altLang="en-US" sz="1600" b="1" dirty="0" smtClean="0">
                 <a:latin typeface="微软雅黑" panose="020B0503020204020204" pitchFamily="34" charset="-122"/>
                 <a:ea typeface="微软雅黑" panose="020B0503020204020204" pitchFamily="34" charset="-122"/>
                 <a:cs typeface="Times New Roman" panose="02020603050405020304" pitchFamily="18" charset="0"/>
@@ -12551,7 +12559,7 @@
               <a:t>本研究方法</a:t>
             </a:r>
             <a:r>
-              <a:rPr lang="zh-CN" altLang="en-US" sz="1600" dirty="0">
+              <a:rPr lang="zh-CN" altLang="en-US" sz="1600" b="1" dirty="0">
                 <a:latin typeface="微软雅黑" panose="020B0503020204020204" pitchFamily="34" charset="-122"/>
                 <a:ea typeface="微软雅黑" panose="020B0503020204020204" pitchFamily="34" charset="-122"/>
                 <a:cs typeface="Times New Roman" panose="02020603050405020304" pitchFamily="18" charset="0"/>
@@ -12716,8 +12724,8 @@
         </p:blipFill>
         <p:spPr>
           <a:xfrm>
-            <a:off x="3124515" y="2292017"/>
-            <a:ext cx="6018312" cy="1675917"/>
+            <a:off x="3055142" y="2139702"/>
+            <a:ext cx="6044109" cy="1944215"/>
           </a:xfrm>
           <a:prstGeom prst="rect">
             <a:avLst/>
@@ -12732,7 +12740,7 @@
         </p:nvSpPr>
         <p:spPr>
           <a:xfrm>
-            <a:off x="3124515" y="3987934"/>
+            <a:off x="2706588" y="3987934"/>
             <a:ext cx="6018312" cy="276999"/>
           </a:xfrm>
           <a:prstGeom prst="rect">
@@ -14364,14 +14372,22 @@
               <a:buChar char="l"/>
             </a:pPr>
             <a:r>
-              <a:rPr lang="zh-CN" altLang="en-US" sz="1600" dirty="0">
+              <a:rPr lang="zh-CN" altLang="en-US" sz="1600" b="1" dirty="0">
                 <a:latin typeface="微软雅黑" panose="020B0503020204020204" pitchFamily="34" charset="-122"/>
                 <a:ea typeface="微软雅黑" panose="020B0503020204020204" pitchFamily="34" charset="-122"/>
                 <a:cs typeface="Times New Roman" panose="02020603050405020304" pitchFamily="18" charset="0"/>
               </a:rPr>
-              <a:t>已有检测：</a:t>
-            </a:r>
-            <a:endParaRPr lang="zh-CN" altLang="en-US" sz="1600" dirty="0">
+              <a:t>已</a:t>
+            </a:r>
+            <a:r>
+              <a:rPr lang="zh-CN" altLang="en-US" sz="1600" b="1" dirty="0" smtClean="0">
+                <a:latin typeface="微软雅黑" panose="020B0503020204020204" pitchFamily="34" charset="-122"/>
+                <a:ea typeface="微软雅黑" panose="020B0503020204020204" pitchFamily="34" charset="-122"/>
+                <a:cs typeface="Times New Roman" panose="02020603050405020304" pitchFamily="18" charset="0"/>
+              </a:rPr>
+              <a:t>有方法：</a:t>
+            </a:r>
+            <a:endParaRPr lang="zh-CN" altLang="en-US" sz="1600" b="1" dirty="0">
               <a:latin typeface="微软雅黑" panose="020B0503020204020204" pitchFamily="34" charset="-122"/>
               <a:ea typeface="微软雅黑" panose="020B0503020204020204" pitchFamily="34" charset="-122"/>
             </a:endParaRPr>
@@ -14477,7 +14493,7 @@
               <a:buChar char="l"/>
             </a:pPr>
             <a:r>
-              <a:rPr lang="zh-CN" altLang="en-US" sz="1600" dirty="0" smtClean="0">
+              <a:rPr lang="zh-CN" altLang="en-US" sz="1600" b="1" dirty="0" smtClean="0">
                 <a:latin typeface="微软雅黑" panose="020B0503020204020204" pitchFamily="34" charset="-122"/>
                 <a:ea typeface="微软雅黑" panose="020B0503020204020204" pitchFamily="34" charset="-122"/>
                 <a:cs typeface="Times New Roman" panose="02020603050405020304" pitchFamily="18" charset="0"/>
@@ -14485,7 +14501,7 @@
               <a:t>本研究方法</a:t>
             </a:r>
             <a:r>
-              <a:rPr lang="zh-CN" altLang="en-US" sz="1600" dirty="0">
+              <a:rPr lang="zh-CN" altLang="en-US" sz="1600" b="1" dirty="0">
                 <a:latin typeface="微软雅黑" panose="020B0503020204020204" pitchFamily="34" charset="-122"/>
                 <a:ea typeface="微软雅黑" panose="020B0503020204020204" pitchFamily="34" charset="-122"/>
                 <a:cs typeface="Times New Roman" panose="02020603050405020304" pitchFamily="18" charset="0"/>
